--- a/courses/apcsp/lect14a.pptx
+++ b/courses/apcsp/lect14a.pptx
@@ -5,7 +5,7 @@
     <p:sldMasterId id="2147483791" r:id="rId1"/>
   </p:sldMasterIdLst>
   <p:notesMasterIdLst>
-    <p:notesMasterId r:id="rId35"/>
+    <p:notesMasterId r:id="rId36"/>
   </p:notesMasterIdLst>
   <p:sldIdLst>
     <p:sldId id="349" r:id="rId2"/>
@@ -33,14 +33,15 @@
     <p:sldId id="626" r:id="rId24"/>
     <p:sldId id="627" r:id="rId25"/>
     <p:sldId id="328" r:id="rId26"/>
-    <p:sldId id="329" r:id="rId27"/>
-    <p:sldId id="335" r:id="rId28"/>
-    <p:sldId id="336" r:id="rId29"/>
-    <p:sldId id="337" r:id="rId30"/>
-    <p:sldId id="628" r:id="rId31"/>
-    <p:sldId id="629" r:id="rId32"/>
-    <p:sldId id="598" r:id="rId33"/>
-    <p:sldId id="649" r:id="rId34"/>
+    <p:sldId id="655" r:id="rId27"/>
+    <p:sldId id="329" r:id="rId28"/>
+    <p:sldId id="335" r:id="rId29"/>
+    <p:sldId id="336" r:id="rId30"/>
+    <p:sldId id="337" r:id="rId31"/>
+    <p:sldId id="628" r:id="rId32"/>
+    <p:sldId id="629" r:id="rId33"/>
+    <p:sldId id="598" r:id="rId34"/>
+    <p:sldId id="649" r:id="rId35"/>
   </p:sldIdLst>
   <p:sldSz cx="9144000" cy="5715000" type="screen16x10"/>
   <p:notesSz cx="6858000" cy="9144000"/>
@@ -147,12 +148,20 @@
 </p:presentation>
 </file>
 
+<file path=ppt/revisionInfo.xml><?xml version="1.0" encoding="utf-8"?>
+<p1510:revInfo xmlns:a="http://schemas.openxmlformats.org/drawingml/2006/main" xmlns:r="http://schemas.openxmlformats.org/officeDocument/2006/relationships" xmlns:p1510="http://schemas.microsoft.com/office/powerpoint/2015/10/main">
+  <p1510:revLst>
+    <p1510:client id="{0CDA19AD-D56D-604B-B26F-1ABCE9E2E7F2}" v="1" dt="2026-02-10T17:52:50.591"/>
+  </p1510:revLst>
+</p1510:revInfo>
+</file>
+
 <file path=ppt/changesInfos/changesInfo1.xml><?xml version="1.0" encoding="utf-8"?>
 <pc:chgInfo xmlns:a="http://schemas.openxmlformats.org/drawingml/2006/main" xmlns:r="http://schemas.openxmlformats.org/officeDocument/2006/relationships" xmlns:ac="http://schemas.microsoft.com/office/drawing/2013/main/command" xmlns:pc="http://schemas.microsoft.com/office/powerpoint/2013/main/command">
   <pc:docChgLst>
     <pc:chgData name="Long B Nguyen" userId="f59fb8f3-a021-417a-8bc1-65c8d471c621" providerId="ADAL" clId="{93BE87BA-F8CA-5C1F-82FF-B4CAB5F485A1}"/>
-    <pc:docChg chg="sldOrd">
-      <pc:chgData name="Long B Nguyen" userId="f59fb8f3-a021-417a-8bc1-65c8d471c621" providerId="ADAL" clId="{93BE87BA-F8CA-5C1F-82FF-B4CAB5F485A1}" dt="2026-02-05T14:46:01.161" v="0" actId="20578"/>
+    <pc:docChg chg="addSld modSld sldOrd">
+      <pc:chgData name="Long B Nguyen" userId="f59fb8f3-a021-417a-8bc1-65c8d471c621" providerId="ADAL" clId="{93BE87BA-F8CA-5C1F-82FF-B4CAB5F485A1}" dt="2026-02-10T17:52:50.590" v="2"/>
       <pc:docMkLst>
         <pc:docMk/>
       </pc:docMkLst>
@@ -162,6 +171,21 @@
           <pc:docMk/>
           <pc:sldMk cId="3176068915" sldId="323"/>
         </pc:sldMkLst>
+      </pc:sldChg>
+      <pc:sldChg chg="addSp new">
+        <pc:chgData name="Long B Nguyen" userId="f59fb8f3-a021-417a-8bc1-65c8d471c621" providerId="ADAL" clId="{93BE87BA-F8CA-5C1F-82FF-B4CAB5F485A1}" dt="2026-02-10T17:52:50.590" v="2"/>
+        <pc:sldMkLst>
+          <pc:docMk/>
+          <pc:sldMk cId="3305937636" sldId="655"/>
+        </pc:sldMkLst>
+        <pc:picChg chg="add">
+          <ac:chgData name="Long B Nguyen" userId="f59fb8f3-a021-417a-8bc1-65c8d471c621" providerId="ADAL" clId="{93BE87BA-F8CA-5C1F-82FF-B4CAB5F485A1}" dt="2026-02-10T17:52:50.590" v="2"/>
+          <ac:picMkLst>
+            <pc:docMk/>
+            <pc:sldMk cId="3305937636" sldId="655"/>
+            <ac:picMk id="5" creationId="{7C569F14-237A-407F-6123-3E9A18BF1A41}"/>
+          </ac:picMkLst>
+        </pc:picChg>
       </pc:sldChg>
     </pc:docChg>
   </pc:docChgLst>
@@ -250,7 +274,7 @@
           <a:p>
             <a:fld id="{11759725-BFEE-644C-A872-B7D4268C5620}" type="datetimeFigureOut">
               <a:rPr lang="en-US" smtClean="0"/>
-              <a:t>2/5/26</a:t>
+              <a:t>2/10/26</a:t>
             </a:fld>
             <a:endParaRPr lang="en-US"/>
           </a:p>
@@ -685,7 +709,7 @@
             <a:fld id="{1483603F-536E-5348-85CA-469E92E29B2B}" type="slidenum">
               <a:rPr lang="en-US" altLang="en-US" smtClean="0"/>
               <a:pPr/>
-              <a:t>32</a:t>
+              <a:t>33</a:t>
             </a:fld>
             <a:endParaRPr lang="en-US" altLang="en-US"/>
           </a:p>
@@ -973,7 +997,7 @@
             <a:fld id="{1483603F-536E-5348-85CA-469E92E29B2B}" type="slidenum">
               <a:rPr lang="en-US" altLang="en-US" smtClean="0"/>
               <a:pPr/>
-              <a:t>33</a:t>
+              <a:t>34</a:t>
             </a:fld>
             <a:endParaRPr lang="en-US" altLang="en-US"/>
           </a:p>
@@ -1224,7 +1248,7 @@
           <a:p>
             <a:fld id="{0B23619B-719A-5549-9239-F6FF1BD2846D}" type="datetime1">
               <a:rPr lang="en-US" smtClean="0"/>
-              <a:t>2/5/26</a:t>
+              <a:t>2/10/26</a:t>
             </a:fld>
             <a:endParaRPr lang="en-US" dirty="0"/>
           </a:p>
@@ -1394,7 +1418,7 @@
           <a:p>
             <a:fld id="{839469B0-555B-D345-BF9F-2FB120243016}" type="datetime1">
               <a:rPr lang="en-US" smtClean="0"/>
-              <a:t>2/5/26</a:t>
+              <a:t>2/10/26</a:t>
             </a:fld>
             <a:endParaRPr lang="en-US" dirty="0"/>
           </a:p>
@@ -1574,7 +1598,7 @@
           <a:p>
             <a:fld id="{036B20A9-234F-5A47-9885-F549043114F6}" type="datetime1">
               <a:rPr lang="en-US" smtClean="0"/>
-              <a:t>2/5/26</a:t>
+              <a:t>2/10/26</a:t>
             </a:fld>
             <a:endParaRPr lang="en-US" dirty="0"/>
           </a:p>
@@ -1744,7 +1768,7 @@
           <a:p>
             <a:fld id="{58C5CB90-DEDB-994B-84BC-9FDB717C5CBD}" type="datetime1">
               <a:rPr lang="en-US" smtClean="0"/>
-              <a:t>2/5/26</a:t>
+              <a:t>2/10/26</a:t>
             </a:fld>
             <a:endParaRPr lang="en-US" dirty="0"/>
           </a:p>
@@ -1990,7 +2014,7 @@
           <a:p>
             <a:fld id="{5BF75833-FF0C-6644-AC7B-34B254D0A954}" type="datetime1">
               <a:rPr lang="en-US" smtClean="0"/>
-              <a:t>2/5/26</a:t>
+              <a:t>2/10/26</a:t>
             </a:fld>
             <a:endParaRPr lang="en-US" dirty="0"/>
           </a:p>
@@ -2222,7 +2246,7 @@
           <a:p>
             <a:fld id="{BADCE700-E6AE-524E-BEEB-46A7E76E8986}" type="datetime1">
               <a:rPr lang="en-US" smtClean="0"/>
-              <a:t>2/5/26</a:t>
+              <a:t>2/10/26</a:t>
             </a:fld>
             <a:endParaRPr lang="en-US" dirty="0"/>
           </a:p>
@@ -2589,7 +2613,7 @@
           <a:p>
             <a:fld id="{D930EA8A-B19A-644A-B658-96DEEEE04EF1}" type="datetime1">
               <a:rPr lang="en-US" smtClean="0"/>
-              <a:t>2/5/26</a:t>
+              <a:t>2/10/26</a:t>
             </a:fld>
             <a:endParaRPr lang="en-US" dirty="0"/>
           </a:p>
@@ -2707,7 +2731,7 @@
           <a:p>
             <a:fld id="{C24E8E52-1C5D-7D47-B85E-8BFF5979B0CB}" type="datetime1">
               <a:rPr lang="en-US" smtClean="0"/>
-              <a:t>2/5/26</a:t>
+              <a:t>2/10/26</a:t>
             </a:fld>
             <a:endParaRPr lang="en-US" dirty="0"/>
           </a:p>
@@ -2802,7 +2826,7 @@
           <a:p>
             <a:fld id="{9B611565-A0EF-0543-9120-E8D7910551BC}" type="datetime1">
               <a:rPr lang="en-US" smtClean="0"/>
-              <a:t>2/5/26</a:t>
+              <a:t>2/10/26</a:t>
             </a:fld>
             <a:endParaRPr lang="en-US" dirty="0"/>
           </a:p>
@@ -3079,7 +3103,7 @@
           <a:p>
             <a:fld id="{C359E2FF-3518-C44C-BE92-D041C193D2F8}" type="datetime1">
               <a:rPr lang="en-US" smtClean="0"/>
-              <a:t>2/5/26</a:t>
+              <a:t>2/10/26</a:t>
             </a:fld>
             <a:endParaRPr lang="en-US" dirty="0"/>
           </a:p>
@@ -3336,7 +3360,7 @@
           <a:p>
             <a:fld id="{C9884FF3-7B81-634E-9C77-D2386ED448CF}" type="datetime1">
               <a:rPr lang="en-US" smtClean="0"/>
-              <a:t>2/5/26</a:t>
+              <a:t>2/10/26</a:t>
             </a:fld>
             <a:endParaRPr lang="en-US" dirty="0"/>
           </a:p>
@@ -3549,7 +3573,7 @@
           <a:p>
             <a:fld id="{8F612B6D-4BD4-3345-A8C8-BA2EEC41AF3A}" type="datetime1">
               <a:rPr lang="en-US" smtClean="0"/>
-              <a:t>2/5/26</a:t>
+              <a:t>2/10/26</a:t>
             </a:fld>
             <a:endParaRPr lang="en-US" dirty="0"/>
           </a:p>
@@ -13581,6 +13605,145 @@
       </p:grpSpPr>
       <p:sp>
         <p:nvSpPr>
+          <p:cNvPr id="2" name="Title 1">
+            <a:extLst>
+              <a:ext uri="{FF2B5EF4-FFF2-40B4-BE49-F238E27FC236}">
+                <a16:creationId xmlns:a16="http://schemas.microsoft.com/office/drawing/2014/main" id="{A417A522-46A0-E460-2C7B-1B35CAF18BE4}"/>
+              </a:ext>
+            </a:extLst>
+          </p:cNvPr>
+          <p:cNvSpPr>
+            <a:spLocks noGrp="1"/>
+          </p:cNvSpPr>
+          <p:nvPr>
+            <p:ph type="title"/>
+          </p:nvPr>
+        </p:nvSpPr>
+        <p:spPr/>
+        <p:txBody>
+          <a:bodyPr/>
+          <a:lstStyle/>
+          <a:p>
+            <a:endParaRPr lang="en-US"/>
+          </a:p>
+        </p:txBody>
+      </p:sp>
+      <p:sp>
+        <p:nvSpPr>
+          <p:cNvPr id="3" name="Content Placeholder 2">
+            <a:extLst>
+              <a:ext uri="{FF2B5EF4-FFF2-40B4-BE49-F238E27FC236}">
+                <a16:creationId xmlns:a16="http://schemas.microsoft.com/office/drawing/2014/main" id="{25C0D5A5-AB64-973F-6440-65051F926079}"/>
+              </a:ext>
+            </a:extLst>
+          </p:cNvPr>
+          <p:cNvSpPr>
+            <a:spLocks noGrp="1"/>
+          </p:cNvSpPr>
+          <p:nvPr>
+            <p:ph idx="1"/>
+          </p:nvPr>
+        </p:nvSpPr>
+        <p:spPr/>
+        <p:txBody>
+          <a:bodyPr/>
+          <a:lstStyle/>
+          <a:p>
+            <a:endParaRPr lang="en-US"/>
+          </a:p>
+        </p:txBody>
+      </p:sp>
+      <p:sp>
+        <p:nvSpPr>
+          <p:cNvPr id="4" name="Slide Number Placeholder 3">
+            <a:extLst>
+              <a:ext uri="{FF2B5EF4-FFF2-40B4-BE49-F238E27FC236}">
+                <a16:creationId xmlns:a16="http://schemas.microsoft.com/office/drawing/2014/main" id="{C2B0494E-7F3D-54FA-2D16-E05A57D73105}"/>
+              </a:ext>
+            </a:extLst>
+          </p:cNvPr>
+          <p:cNvSpPr>
+            <a:spLocks noGrp="1"/>
+          </p:cNvSpPr>
+          <p:nvPr>
+            <p:ph type="sldNum" sz="quarter" idx="12"/>
+          </p:nvPr>
+        </p:nvSpPr>
+        <p:spPr/>
+        <p:txBody>
+          <a:bodyPr/>
+          <a:lstStyle/>
+          <a:p>
+            <a:fld id="{D57F1E4F-1CFF-5643-939E-02111984F565}" type="slidenum">
+              <a:rPr lang="en-US" smtClean="0"/>
+              <a:t>26</a:t>
+            </a:fld>
+            <a:endParaRPr lang="en-US" dirty="0"/>
+          </a:p>
+        </p:txBody>
+      </p:sp>
+      <p:pic>
+        <p:nvPicPr>
+          <p:cNvPr id="5" name="Picture 4">
+            <a:extLst>
+              <a:ext uri="{FF2B5EF4-FFF2-40B4-BE49-F238E27FC236}">
+                <a16:creationId xmlns:a16="http://schemas.microsoft.com/office/drawing/2014/main" id="{7C569F14-237A-407F-6123-3E9A18BF1A41}"/>
+              </a:ext>
+            </a:extLst>
+          </p:cNvPr>
+          <p:cNvPicPr>
+            <a:picLocks noChangeAspect="1"/>
+          </p:cNvPicPr>
+          <p:nvPr/>
+        </p:nvPicPr>
+        <p:blipFill>
+          <a:blip r:embed="rId2"/>
+          <a:stretch>
+            <a:fillRect/>
+          </a:stretch>
+        </p:blipFill>
+        <p:spPr>
+          <a:xfrm>
+            <a:off x="739849" y="0"/>
+            <a:ext cx="7664302" cy="5715000"/>
+          </a:xfrm>
+          <a:prstGeom prst="rect">
+            <a:avLst/>
+          </a:prstGeom>
+        </p:spPr>
+      </p:pic>
+    </p:spTree>
+    <p:extLst>
+      <p:ext uri="{BB962C8B-B14F-4D97-AF65-F5344CB8AC3E}">
+        <p14:creationId xmlns:p14="http://schemas.microsoft.com/office/powerpoint/2010/main" val="3305937636"/>
+      </p:ext>
+    </p:extLst>
+  </p:cSld>
+  <p:clrMapOvr>
+    <a:masterClrMapping/>
+  </p:clrMapOvr>
+</p:sld>
+</file>
+
+<file path=ppt/slides/slide27.xml><?xml version="1.0" encoding="utf-8"?>
+<p:sld xmlns:a="http://schemas.openxmlformats.org/drawingml/2006/main" xmlns:r="http://schemas.openxmlformats.org/officeDocument/2006/relationships" xmlns:p="http://schemas.openxmlformats.org/presentationml/2006/main">
+  <p:cSld>
+    <p:spTree>
+      <p:nvGrpSpPr>
+        <p:cNvPr id="1" name=""/>
+        <p:cNvGrpSpPr/>
+        <p:nvPr/>
+      </p:nvGrpSpPr>
+      <p:grpSpPr>
+        <a:xfrm>
+          <a:off x="0" y="0"/>
+          <a:ext cx="0" cy="0"/>
+          <a:chOff x="0" y="0"/>
+          <a:chExt cx="0" cy="0"/>
+        </a:xfrm>
+      </p:grpSpPr>
+      <p:sp>
+        <p:nvSpPr>
           <p:cNvPr id="38913" name="Title 1">
             <a:extLst>
               <a:ext uri="{FF2B5EF4-FFF2-40B4-BE49-F238E27FC236}">
@@ -14210,7 +14373,7 @@
           <a:p>
             <a:fld id="{D57F1E4F-1CFF-5643-939E-02111984F565}" type="slidenum">
               <a:rPr lang="en-US" smtClean="0"/>
-              <a:t>26</a:t>
+              <a:t>27</a:t>
             </a:fld>
             <a:endParaRPr lang="en-US" dirty="0"/>
           </a:p>
@@ -14687,7 +14850,7 @@
 </p:sld>
 </file>
 
-<file path=ppt/slides/slide27.xml><?xml version="1.0" encoding="utf-8"?>
+<file path=ppt/slides/slide28.xml><?xml version="1.0" encoding="utf-8"?>
 <p:sld xmlns:a="http://schemas.openxmlformats.org/drawingml/2006/main" xmlns:r="http://schemas.openxmlformats.org/officeDocument/2006/relationships" xmlns:p="http://schemas.openxmlformats.org/presentationml/2006/main">
   <p:cSld>
     <p:spTree>
@@ -15107,7 +15270,7 @@
           <a:p>
             <a:fld id="{D57F1E4F-1CFF-5643-939E-02111984F565}" type="slidenum">
               <a:rPr lang="en-US" smtClean="0"/>
-              <a:t>27</a:t>
+              <a:t>28</a:t>
             </a:fld>
             <a:endParaRPr lang="en-US" dirty="0"/>
           </a:p>
@@ -15303,7 +15466,7 @@
 </p:sld>
 </file>
 
-<file path=ppt/slides/slide28.xml><?xml version="1.0" encoding="utf-8"?>
+<file path=ppt/slides/slide29.xml><?xml version="1.0" encoding="utf-8"?>
 <p:sld xmlns:a="http://schemas.openxmlformats.org/drawingml/2006/main" xmlns:r="http://schemas.openxmlformats.org/officeDocument/2006/relationships" xmlns:p="http://schemas.openxmlformats.org/presentationml/2006/main">
   <p:cSld>
     <p:spTree>
@@ -15660,7 +15823,7 @@
           <a:p>
             <a:fld id="{D57F1E4F-1CFF-5643-939E-02111984F565}" type="slidenum">
               <a:rPr lang="en-US" smtClean="0"/>
-              <a:t>28</a:t>
+              <a:t>29</a:t>
             </a:fld>
             <a:endParaRPr lang="en-US" dirty="0"/>
           </a:p>
@@ -15762,658 +15925,6 @@
                                           <p:spTgt spid="3">
                                             <p:txEl>
                                               <p:pRg st="3" end="3"/>
-                                            </p:txEl>
-                                          </p:spTgt>
-                                        </p:tgtEl>
-                                        <p:attrNameLst>
-                                          <p:attrName>style.visibility</p:attrName>
-                                        </p:attrNameLst>
-                                      </p:cBhvr>
-                                      <p:to>
-                                        <p:strVal val="visible"/>
-                                      </p:to>
-                                    </p:set>
-                                  </p:childTnLst>
-                                </p:cTn>
-                              </p:par>
-                            </p:childTnLst>
-                          </p:cTn>
-                        </p:par>
-                      </p:childTnLst>
-                    </p:cTn>
-                  </p:par>
-                </p:childTnLst>
-              </p:cTn>
-              <p:prevCondLst>
-                <p:cond evt="onPrev" delay="0">
-                  <p:tgtEl>
-                    <p:sldTgt/>
-                  </p:tgtEl>
-                </p:cond>
-              </p:prevCondLst>
-              <p:nextCondLst>
-                <p:cond evt="onNext" delay="0">
-                  <p:tgtEl>
-                    <p:sldTgt/>
-                  </p:tgtEl>
-                </p:cond>
-              </p:nextCondLst>
-            </p:seq>
-          </p:childTnLst>
-        </p:cTn>
-      </p:par>
-    </p:tnLst>
-  </p:timing>
-</p:sld>
-</file>
-
-<file path=ppt/slides/slide29.xml><?xml version="1.0" encoding="utf-8"?>
-<p:sld xmlns:a="http://schemas.openxmlformats.org/drawingml/2006/main" xmlns:r="http://schemas.openxmlformats.org/officeDocument/2006/relationships" xmlns:p="http://schemas.openxmlformats.org/presentationml/2006/main">
-  <p:cSld>
-    <p:spTree>
-      <p:nvGrpSpPr>
-        <p:cNvPr id="1" name=""/>
-        <p:cNvGrpSpPr/>
-        <p:nvPr/>
-      </p:nvGrpSpPr>
-      <p:grpSpPr>
-        <a:xfrm>
-          <a:off x="0" y="0"/>
-          <a:ext cx="0" cy="0"/>
-          <a:chOff x="0" y="0"/>
-          <a:chExt cx="0" cy="0"/>
-        </a:xfrm>
-      </p:grpSpPr>
-      <p:sp>
-        <p:nvSpPr>
-          <p:cNvPr id="48129" name="Title 1">
-            <a:extLst>
-              <a:ext uri="{FF2B5EF4-FFF2-40B4-BE49-F238E27FC236}">
-                <a16:creationId xmlns:a16="http://schemas.microsoft.com/office/drawing/2014/main" id="{328FB4D7-49E6-9E40-B559-A0D74E019365}"/>
-              </a:ext>
-            </a:extLst>
-          </p:cNvPr>
-          <p:cNvSpPr>
-            <a:spLocks noGrp="1" noChangeArrowheads="1"/>
-          </p:cNvSpPr>
-          <p:nvPr>
-            <p:ph type="title"/>
-          </p:nvPr>
-        </p:nvSpPr>
-        <p:spPr>
-          <a:xfrm>
-            <a:off x="266925" y="197778"/>
-            <a:ext cx="7888626" cy="802732"/>
-          </a:xfrm>
-        </p:spPr>
-        <p:txBody>
-          <a:bodyPr/>
-          <a:lstStyle/>
-          <a:p>
-            <a:pPr eaLnBrk="1" hangingPunct="1"/>
-            <a:r>
-              <a:rPr lang="en-US" altLang="en-US" dirty="0">
-                <a:ea typeface="ＭＳ Ｐゴシック" panose="020B0600070205080204" pitchFamily="34" charset="-128"/>
-              </a:rPr>
-              <a:t>UTF-16 and UTF-8</a:t>
-            </a:r>
-          </a:p>
-        </p:txBody>
-      </p:sp>
-      <p:sp>
-        <p:nvSpPr>
-          <p:cNvPr id="3" name="Content Placeholder 2">
-            <a:extLst>
-              <a:ext uri="{FF2B5EF4-FFF2-40B4-BE49-F238E27FC236}">
-                <a16:creationId xmlns:a16="http://schemas.microsoft.com/office/drawing/2014/main" id="{EDD173A5-7515-4344-96F1-DFBABC544ED0}"/>
-              </a:ext>
-            </a:extLst>
-          </p:cNvPr>
-          <p:cNvSpPr>
-            <a:spLocks noGrp="1" noChangeArrowheads="1"/>
-          </p:cNvSpPr>
-          <p:nvPr>
-            <p:ph idx="1"/>
-          </p:nvPr>
-        </p:nvSpPr>
-        <p:spPr>
-          <a:xfrm>
-            <a:off x="266925" y="883578"/>
-            <a:ext cx="8733237" cy="4633644"/>
-          </a:xfrm>
-        </p:spPr>
-        <p:txBody>
-          <a:bodyPr/>
-          <a:lstStyle/>
-          <a:p>
-            <a:pPr marL="0" indent="0">
-              <a:buNone/>
-            </a:pPr>
-            <a:r>
-              <a:rPr lang="en-US" altLang="en-US" sz="1667" b="1" dirty="0">
-                <a:ea typeface="ＭＳ Ｐゴシック" panose="020B0600070205080204" pitchFamily="34" charset="-128"/>
-              </a:rPr>
-              <a:t>UTF-16 </a:t>
-            </a:r>
-            <a:r>
-              <a:rPr lang="en-US" altLang="en-US" sz="1667" dirty="0">
-                <a:ea typeface="ＭＳ Ｐゴシック" panose="020B0600070205080204" pitchFamily="34" charset="-128"/>
-              </a:rPr>
-              <a:t>and </a:t>
-            </a:r>
-            <a:r>
-              <a:rPr lang="en-US" altLang="en-US" sz="1667" b="1" dirty="0">
-                <a:ea typeface="ＭＳ Ｐゴシック" panose="020B0600070205080204" pitchFamily="34" charset="-128"/>
-              </a:rPr>
-              <a:t>UTF-8 </a:t>
-            </a:r>
-            <a:r>
-              <a:rPr lang="en-US" altLang="en-US" sz="1667" dirty="0">
-                <a:ea typeface="ＭＳ Ｐゴシック" panose="020B0600070205080204" pitchFamily="34" charset="-128"/>
-              </a:rPr>
-              <a:t>are </a:t>
-            </a:r>
-            <a:r>
-              <a:rPr lang="en-US" altLang="en-US" sz="1667" i="1" dirty="0">
-                <a:ea typeface="ＭＳ Ｐゴシック" panose="020B0600070205080204" pitchFamily="34" charset="-128"/>
-              </a:rPr>
-              <a:t>variable-length encodings</a:t>
-            </a:r>
-            <a:r>
-              <a:rPr lang="en-US" altLang="en-US" sz="1667" dirty="0">
-                <a:ea typeface="ＭＳ Ｐゴシック" panose="020B0600070205080204" pitchFamily="34" charset="-128"/>
-              </a:rPr>
-              <a:t>. If a character can be represented using a single byte (because its code point is a very small number), UTF-8 will encode it with a single byte. If it requires two bytes, it will use two bytes and so on. UTF-16 is in the middle, using at least two bytes, growing to up to four bytes as necessary.</a:t>
-            </a:r>
-          </a:p>
-          <a:p>
-            <a:pPr marL="0" indent="0">
-              <a:buNone/>
-            </a:pPr>
-            <a:endParaRPr lang="en-US" altLang="en-US" sz="1667" dirty="0">
-              <a:ea typeface="ＭＳ Ｐゴシック" panose="020B0600070205080204" pitchFamily="34" charset="-128"/>
-            </a:endParaRPr>
-          </a:p>
-          <a:p>
-            <a:pPr marL="0" indent="0">
-              <a:buNone/>
-            </a:pPr>
-            <a:endParaRPr lang="en-US" altLang="en-US" sz="1667" dirty="0">
-              <a:ea typeface="ＭＳ Ｐゴシック" panose="020B0600070205080204" pitchFamily="34" charset="-128"/>
-            </a:endParaRPr>
-          </a:p>
-          <a:p>
-            <a:pPr marL="0" indent="0">
-              <a:buNone/>
-            </a:pPr>
-            <a:endParaRPr lang="en-US" altLang="en-US" sz="1667" dirty="0">
-              <a:ea typeface="ＭＳ Ｐゴシック" panose="020B0600070205080204" pitchFamily="34" charset="-128"/>
-            </a:endParaRPr>
-          </a:p>
-          <a:p>
-            <a:pPr marL="0" indent="0">
-              <a:buNone/>
-            </a:pPr>
-            <a:endParaRPr lang="en-US" altLang="en-US" sz="1667" dirty="0">
-              <a:ea typeface="ＭＳ Ｐゴシック" panose="020B0600070205080204" pitchFamily="34" charset="-128"/>
-            </a:endParaRPr>
-          </a:p>
-          <a:p>
-            <a:pPr marL="0" indent="0">
-              <a:buNone/>
-            </a:pPr>
-            <a:endParaRPr lang="en-US" altLang="en-US" sz="1667" dirty="0">
-              <a:ea typeface="ＭＳ Ｐゴシック" panose="020B0600070205080204" pitchFamily="34" charset="-128"/>
-            </a:endParaRPr>
-          </a:p>
-          <a:p>
-            <a:pPr marL="0" indent="0">
-              <a:buNone/>
-            </a:pPr>
-            <a:endParaRPr lang="en-US" altLang="en-US" sz="1667" dirty="0">
-              <a:ea typeface="ＭＳ Ｐゴシック" panose="020B0600070205080204" pitchFamily="34" charset="-128"/>
-            </a:endParaRPr>
-          </a:p>
-          <a:p>
-            <a:pPr marL="0" indent="0">
-              <a:buNone/>
-            </a:pPr>
-            <a:endParaRPr lang="en-US" altLang="en-US" sz="1667" dirty="0">
-              <a:ea typeface="ＭＳ Ｐゴシック" panose="020B0600070205080204" pitchFamily="34" charset="-128"/>
-            </a:endParaRPr>
-          </a:p>
-          <a:p>
-            <a:pPr marL="0" indent="0">
-              <a:buNone/>
-            </a:pPr>
-            <a:endParaRPr lang="en-US" altLang="en-US" sz="1667" dirty="0">
-              <a:ea typeface="ＭＳ Ｐゴシック" panose="020B0600070205080204" pitchFamily="34" charset="-128"/>
-            </a:endParaRPr>
-          </a:p>
-          <a:p>
-            <a:pPr marL="0" indent="0">
-              <a:buNone/>
-            </a:pPr>
-            <a:endParaRPr lang="en-US" altLang="en-US" sz="1667" dirty="0">
-              <a:ea typeface="ＭＳ Ｐゴシック" panose="020B0600070205080204" pitchFamily="34" charset="-128"/>
-            </a:endParaRPr>
-          </a:p>
-          <a:p>
-            <a:pPr marL="0" indent="0">
-              <a:buNone/>
-            </a:pPr>
-            <a:r>
-              <a:rPr lang="en-US" altLang="en-US" sz="1667" b="1" dirty="0">
-                <a:ea typeface="ＭＳ Ｐゴシック" panose="020B0600070205080204" pitchFamily="34" charset="-128"/>
-              </a:rPr>
-              <a:t>Unicode is a large table mapping characters to numbers and the different UTF encodings specify how these numbers are encoded as bits.</a:t>
-            </a:r>
-          </a:p>
-          <a:p>
-            <a:pPr marL="0" indent="0">
-              <a:buNone/>
-            </a:pPr>
-            <a:endParaRPr lang="en-US" altLang="en-US" sz="1667" dirty="0">
-              <a:ea typeface="ＭＳ Ｐゴシック" panose="020B0600070205080204" pitchFamily="34" charset="-128"/>
-            </a:endParaRPr>
-          </a:p>
-          <a:p>
-            <a:pPr marL="0" indent="0">
-              <a:buNone/>
-            </a:pPr>
-            <a:endParaRPr lang="en-US" altLang="en-US" sz="1667" dirty="0">
-              <a:ea typeface="ＭＳ Ｐゴシック" panose="020B0600070205080204" pitchFamily="34" charset="-128"/>
-            </a:endParaRPr>
-          </a:p>
-        </p:txBody>
-      </p:sp>
-      <p:sp>
-        <p:nvSpPr>
-          <p:cNvPr id="48131" name="TextBox 3">
-            <a:extLst>
-              <a:ext uri="{FF2B5EF4-FFF2-40B4-BE49-F238E27FC236}">
-                <a16:creationId xmlns:a16="http://schemas.microsoft.com/office/drawing/2014/main" id="{DDB8E675-AFDF-E34D-9CF4-E13C67A198ED}"/>
-              </a:ext>
-            </a:extLst>
-          </p:cNvPr>
-          <p:cNvSpPr txBox="1">
-            <a:spLocks noChangeArrowheads="1"/>
-          </p:cNvSpPr>
-          <p:nvPr/>
-        </p:nvSpPr>
-        <p:spPr bwMode="auto">
-          <a:xfrm>
-            <a:off x="3892021" y="67470"/>
-            <a:ext cx="184731" cy="323165"/>
-          </a:xfrm>
-          <a:prstGeom prst="rect">
-            <a:avLst/>
-          </a:prstGeom>
-          <a:noFill/>
-          <a:ln>
-            <a:noFill/>
-          </a:ln>
-          <a:extLst>
-            <a:ext uri="{909E8E84-426E-40DD-AFC4-6F175D3DCCD1}">
-              <a14:hiddenFill xmlns:a14="http://schemas.microsoft.com/office/drawing/2010/main">
-                <a:solidFill>
-                  <a:srgbClr val="FFFFFF"/>
-                </a:solidFill>
-              </a14:hiddenFill>
-            </a:ext>
-            <a:ext uri="{91240B29-F687-4F45-9708-019B960494DF}">
-              <a14:hiddenLine xmlns:a14="http://schemas.microsoft.com/office/drawing/2010/main" w="9525">
-                <a:solidFill>
-                  <a:srgbClr val="000000"/>
-                </a:solidFill>
-                <a:miter lim="800000"/>
-                <a:headEnd/>
-                <a:tailEnd/>
-              </a14:hiddenLine>
-            </a:ext>
-          </a:extLst>
-        </p:spPr>
-        <p:txBody>
-          <a:bodyPr wrap="none">
-            <a:spAutoFit/>
-          </a:bodyPr>
-          <a:lstStyle>
-            <a:lvl1pPr>
-              <a:spcBef>
-                <a:spcPct val="20000"/>
-              </a:spcBef>
-              <a:buChar char="•"/>
-              <a:defRPr sz="3200">
-                <a:solidFill>
-                  <a:schemeClr val="tx1"/>
-                </a:solidFill>
-                <a:latin typeface="Arial" panose="020B0604020202020204" pitchFamily="34" charset="0"/>
-                <a:ea typeface="ＭＳ Ｐゴシック" panose="020B0600070205080204" pitchFamily="34" charset="-128"/>
-                <a:cs typeface="Arial" panose="020B0604020202020204" pitchFamily="34" charset="0"/>
-              </a:defRPr>
-            </a:lvl1pPr>
-            <a:lvl2pPr marL="742950" indent="-285750">
-              <a:spcBef>
-                <a:spcPct val="20000"/>
-              </a:spcBef>
-              <a:buChar char="–"/>
-              <a:defRPr sz="2800">
-                <a:solidFill>
-                  <a:schemeClr val="tx1"/>
-                </a:solidFill>
-                <a:latin typeface="Arial" panose="020B0604020202020204" pitchFamily="34" charset="0"/>
-                <a:ea typeface="Arial" panose="020B0604020202020204" pitchFamily="34" charset="0"/>
-                <a:cs typeface="Arial" panose="020B0604020202020204" pitchFamily="34" charset="0"/>
-              </a:defRPr>
-            </a:lvl2pPr>
-            <a:lvl3pPr marL="1143000" indent="-228600">
-              <a:spcBef>
-                <a:spcPct val="20000"/>
-              </a:spcBef>
-              <a:buChar char="•"/>
-              <a:defRPr sz="2400">
-                <a:solidFill>
-                  <a:schemeClr val="tx1"/>
-                </a:solidFill>
-                <a:latin typeface="Arial" panose="020B0604020202020204" pitchFamily="34" charset="0"/>
-                <a:ea typeface="Arial" panose="020B0604020202020204" pitchFamily="34" charset="0"/>
-                <a:cs typeface="Arial" panose="020B0604020202020204" pitchFamily="34" charset="0"/>
-              </a:defRPr>
-            </a:lvl3pPr>
-            <a:lvl4pPr marL="1600200" indent="-228600">
-              <a:spcBef>
-                <a:spcPct val="20000"/>
-              </a:spcBef>
-              <a:buChar char="–"/>
-              <a:defRPr sz="2000">
-                <a:solidFill>
-                  <a:schemeClr val="tx1"/>
-                </a:solidFill>
-                <a:latin typeface="Arial" panose="020B0604020202020204" pitchFamily="34" charset="0"/>
-                <a:ea typeface="Arial" panose="020B0604020202020204" pitchFamily="34" charset="0"/>
-                <a:cs typeface="Arial" panose="020B0604020202020204" pitchFamily="34" charset="0"/>
-              </a:defRPr>
-            </a:lvl4pPr>
-            <a:lvl5pPr marL="2057400" indent="-228600">
-              <a:spcBef>
-                <a:spcPct val="20000"/>
-              </a:spcBef>
-              <a:buChar char="»"/>
-              <a:defRPr sz="2000">
-                <a:solidFill>
-                  <a:schemeClr val="tx1"/>
-                </a:solidFill>
-                <a:latin typeface="Arial" panose="020B0604020202020204" pitchFamily="34" charset="0"/>
-                <a:ea typeface="Arial" panose="020B0604020202020204" pitchFamily="34" charset="0"/>
-                <a:cs typeface="Arial" panose="020B0604020202020204" pitchFamily="34" charset="0"/>
-              </a:defRPr>
-            </a:lvl5pPr>
-            <a:lvl6pPr marL="2514600" indent="-228600" eaLnBrk="0" fontAlgn="base" hangingPunct="0">
-              <a:spcBef>
-                <a:spcPct val="20000"/>
-              </a:spcBef>
-              <a:spcAft>
-                <a:spcPct val="0"/>
-              </a:spcAft>
-              <a:buChar char="»"/>
-              <a:defRPr sz="2000">
-                <a:solidFill>
-                  <a:schemeClr val="tx1"/>
-                </a:solidFill>
-                <a:latin typeface="Arial" panose="020B0604020202020204" pitchFamily="34" charset="0"/>
-                <a:ea typeface="Arial" panose="020B0604020202020204" pitchFamily="34" charset="0"/>
-                <a:cs typeface="Arial" panose="020B0604020202020204" pitchFamily="34" charset="0"/>
-              </a:defRPr>
-            </a:lvl6pPr>
-            <a:lvl7pPr marL="2971800" indent="-228600" eaLnBrk="0" fontAlgn="base" hangingPunct="0">
-              <a:spcBef>
-                <a:spcPct val="20000"/>
-              </a:spcBef>
-              <a:spcAft>
-                <a:spcPct val="0"/>
-              </a:spcAft>
-              <a:buChar char="»"/>
-              <a:defRPr sz="2000">
-                <a:solidFill>
-                  <a:schemeClr val="tx1"/>
-                </a:solidFill>
-                <a:latin typeface="Arial" panose="020B0604020202020204" pitchFamily="34" charset="0"/>
-                <a:ea typeface="Arial" panose="020B0604020202020204" pitchFamily="34" charset="0"/>
-                <a:cs typeface="Arial" panose="020B0604020202020204" pitchFamily="34" charset="0"/>
-              </a:defRPr>
-            </a:lvl7pPr>
-            <a:lvl8pPr marL="3429000" indent="-228600" eaLnBrk="0" fontAlgn="base" hangingPunct="0">
-              <a:spcBef>
-                <a:spcPct val="20000"/>
-              </a:spcBef>
-              <a:spcAft>
-                <a:spcPct val="0"/>
-              </a:spcAft>
-              <a:buChar char="»"/>
-              <a:defRPr sz="2000">
-                <a:solidFill>
-                  <a:schemeClr val="tx1"/>
-                </a:solidFill>
-                <a:latin typeface="Arial" panose="020B0604020202020204" pitchFamily="34" charset="0"/>
-                <a:ea typeface="Arial" panose="020B0604020202020204" pitchFamily="34" charset="0"/>
-                <a:cs typeface="Arial" panose="020B0604020202020204" pitchFamily="34" charset="0"/>
-              </a:defRPr>
-            </a:lvl8pPr>
-            <a:lvl9pPr marL="3886200" indent="-228600" eaLnBrk="0" fontAlgn="base" hangingPunct="0">
-              <a:spcBef>
-                <a:spcPct val="20000"/>
-              </a:spcBef>
-              <a:spcAft>
-                <a:spcPct val="0"/>
-              </a:spcAft>
-              <a:buChar char="»"/>
-              <a:defRPr sz="2000">
-                <a:solidFill>
-                  <a:schemeClr val="tx1"/>
-                </a:solidFill>
-                <a:latin typeface="Arial" panose="020B0604020202020204" pitchFamily="34" charset="0"/>
-                <a:ea typeface="Arial" panose="020B0604020202020204" pitchFamily="34" charset="0"/>
-                <a:cs typeface="Arial" panose="020B0604020202020204" pitchFamily="34" charset="0"/>
-              </a:defRPr>
-            </a:lvl9pPr>
-          </a:lstStyle>
-          <a:p>
-            <a:pPr>
-              <a:spcBef>
-                <a:spcPct val="0"/>
-              </a:spcBef>
-              <a:buFontTx/>
-              <a:buNone/>
-            </a:pPr>
-            <a:endParaRPr lang="en-US" altLang="en-US" sz="1500"/>
-          </a:p>
-        </p:txBody>
-      </p:sp>
-      <p:pic>
-        <p:nvPicPr>
-          <p:cNvPr id="5" name="Picture 3">
-            <a:extLst>
-              <a:ext uri="{FF2B5EF4-FFF2-40B4-BE49-F238E27FC236}">
-                <a16:creationId xmlns:a16="http://schemas.microsoft.com/office/drawing/2014/main" id="{CA642D09-6AF6-464A-A462-CA3AD0CFF973}"/>
-              </a:ext>
-            </a:extLst>
-          </p:cNvPr>
-          <p:cNvPicPr>
-            <a:picLocks noChangeAspect="1"/>
-          </p:cNvPicPr>
-          <p:nvPr/>
-        </p:nvPicPr>
-        <p:blipFill>
-          <a:blip r:embed="rId2">
-            <a:extLst>
-              <a:ext uri="{28A0092B-C50C-407E-A947-70E740481C1C}">
-                <a14:useLocalDpi xmlns:a14="http://schemas.microsoft.com/office/drawing/2010/main" val="0"/>
-              </a:ext>
-            </a:extLst>
-          </a:blip>
-          <a:srcRect/>
-          <a:stretch>
-            <a:fillRect/>
-          </a:stretch>
-        </p:blipFill>
-        <p:spPr bwMode="auto">
-          <a:xfrm>
-            <a:off x="1659302" y="2004080"/>
-            <a:ext cx="6703218" cy="2700073"/>
-          </a:xfrm>
-          <a:prstGeom prst="rect">
-            <a:avLst/>
-          </a:prstGeom>
-          <a:noFill/>
-          <a:ln>
-            <a:noFill/>
-          </a:ln>
-          <a:extLst>
-            <a:ext uri="{909E8E84-426E-40DD-AFC4-6F175D3DCCD1}">
-              <a14:hiddenFill xmlns:a14="http://schemas.microsoft.com/office/drawing/2010/main">
-                <a:solidFill>
-                  <a:srgbClr val="FFFFFF"/>
-                </a:solidFill>
-              </a14:hiddenFill>
-            </a:ext>
-            <a:ext uri="{91240B29-F687-4F45-9708-019B960494DF}">
-              <a14:hiddenLine xmlns:a14="http://schemas.microsoft.com/office/drawing/2010/main" w="9525">
-                <a:solidFill>
-                  <a:srgbClr val="000000"/>
-                </a:solidFill>
-                <a:miter lim="800000"/>
-                <a:headEnd/>
-                <a:tailEnd/>
-              </a14:hiddenLine>
-            </a:ext>
-          </a:extLst>
-        </p:spPr>
-      </p:pic>
-      <p:sp>
-        <p:nvSpPr>
-          <p:cNvPr id="2" name="Slide Number Placeholder 1">
-            <a:extLst>
-              <a:ext uri="{FF2B5EF4-FFF2-40B4-BE49-F238E27FC236}">
-                <a16:creationId xmlns:a16="http://schemas.microsoft.com/office/drawing/2014/main" id="{161C1759-1CD1-C726-B41B-4CEB12A16F73}"/>
-              </a:ext>
-            </a:extLst>
-          </p:cNvPr>
-          <p:cNvSpPr>
-            <a:spLocks noGrp="1"/>
-          </p:cNvSpPr>
-          <p:nvPr>
-            <p:ph type="sldNum" sz="quarter" idx="12"/>
-          </p:nvPr>
-        </p:nvSpPr>
-        <p:spPr/>
-        <p:txBody>
-          <a:bodyPr/>
-          <a:lstStyle/>
-          <a:p>
-            <a:fld id="{D57F1E4F-1CFF-5643-939E-02111984F565}" type="slidenum">
-              <a:rPr lang="en-US" smtClean="0"/>
-              <a:t>29</a:t>
-            </a:fld>
-            <a:endParaRPr lang="en-US" dirty="0"/>
-          </a:p>
-        </p:txBody>
-      </p:sp>
-    </p:spTree>
-    <p:extLst>
-      <p:ext uri="{BB962C8B-B14F-4D97-AF65-F5344CB8AC3E}">
-        <p14:creationId xmlns:p14="http://schemas.microsoft.com/office/powerpoint/2010/main" val="461704868"/>
-      </p:ext>
-    </p:extLst>
-  </p:cSld>
-  <p:clrMapOvr>
-    <a:masterClrMapping/>
-  </p:clrMapOvr>
-  <p:timing>
-    <p:tnLst>
-      <p:par>
-        <p:cTn id="1" dur="indefinite" restart="never" nodeType="tmRoot">
-          <p:childTnLst>
-            <p:seq concurrent="1" nextAc="seek">
-              <p:cTn id="2" dur="indefinite" nodeType="mainSeq">
-                <p:childTnLst>
-                  <p:par>
-                    <p:cTn id="3" fill="hold" nodeType="clickPar">
-                      <p:stCondLst>
-                        <p:cond delay="indefinite"/>
-                      </p:stCondLst>
-                      <p:childTnLst>
-                        <p:par>
-                          <p:cTn id="4" fill="hold" nodeType="withGroup">
-                            <p:stCondLst>
-                              <p:cond delay="0"/>
-                            </p:stCondLst>
-                            <p:childTnLst>
-                              <p:par>
-                                <p:cTn id="5" presetID="1" presetClass="entr" presetSubtype="0" fill="hold" nodeType="clickEffect">
-                                  <p:stCondLst>
-                                    <p:cond delay="0"/>
-                                  </p:stCondLst>
-                                  <p:childTnLst>
-                                    <p:set>
-                                      <p:cBhvr>
-                                        <p:cTn id="6" dur="1" fill="hold">
-                                          <p:stCondLst>
-                                            <p:cond delay="0"/>
-                                          </p:stCondLst>
-                                        </p:cTn>
-                                        <p:tgtEl>
-                                          <p:spTgt spid="3">
-                                            <p:txEl>
-                                              <p:pRg st="0" end="0"/>
-                                            </p:txEl>
-                                          </p:spTgt>
-                                        </p:tgtEl>
-                                        <p:attrNameLst>
-                                          <p:attrName>style.visibility</p:attrName>
-                                        </p:attrNameLst>
-                                      </p:cBhvr>
-                                      <p:to>
-                                        <p:strVal val="visible"/>
-                                      </p:to>
-                                    </p:set>
-                                  </p:childTnLst>
-                                </p:cTn>
-                              </p:par>
-                            </p:childTnLst>
-                          </p:cTn>
-                        </p:par>
-                      </p:childTnLst>
-                    </p:cTn>
-                  </p:par>
-                  <p:par>
-                    <p:cTn id="7" fill="hold">
-                      <p:stCondLst>
-                        <p:cond delay="indefinite"/>
-                      </p:stCondLst>
-                      <p:childTnLst>
-                        <p:par>
-                          <p:cTn id="8" fill="hold">
-                            <p:stCondLst>
-                              <p:cond delay="0"/>
-                            </p:stCondLst>
-                            <p:childTnLst>
-                              <p:par>
-                                <p:cTn id="9" presetID="1" presetClass="entr" presetSubtype="0" fill="hold" nodeType="clickEffect">
-                                  <p:stCondLst>
-                                    <p:cond delay="0"/>
-                                  </p:stCondLst>
-                                  <p:childTnLst>
-                                    <p:set>
-                                      <p:cBhvr>
-                                        <p:cTn id="10" dur="1" fill="hold">
-                                          <p:stCondLst>
-                                            <p:cond delay="0"/>
-                                          </p:stCondLst>
-                                        </p:cTn>
-                                        <p:tgtEl>
-                                          <p:spTgt spid="3">
-                                            <p:txEl>
-                                              <p:pRg st="10" end="10"/>
                                             </p:txEl>
                                           </p:spTgt>
                                         </p:tgtEl>
@@ -17042,6 +16553,658 @@
       </p:grpSpPr>
       <p:sp>
         <p:nvSpPr>
+          <p:cNvPr id="48129" name="Title 1">
+            <a:extLst>
+              <a:ext uri="{FF2B5EF4-FFF2-40B4-BE49-F238E27FC236}">
+                <a16:creationId xmlns:a16="http://schemas.microsoft.com/office/drawing/2014/main" id="{328FB4D7-49E6-9E40-B559-A0D74E019365}"/>
+              </a:ext>
+            </a:extLst>
+          </p:cNvPr>
+          <p:cNvSpPr>
+            <a:spLocks noGrp="1" noChangeArrowheads="1"/>
+          </p:cNvSpPr>
+          <p:nvPr>
+            <p:ph type="title"/>
+          </p:nvPr>
+        </p:nvSpPr>
+        <p:spPr>
+          <a:xfrm>
+            <a:off x="266925" y="197778"/>
+            <a:ext cx="7888626" cy="802732"/>
+          </a:xfrm>
+        </p:spPr>
+        <p:txBody>
+          <a:bodyPr/>
+          <a:lstStyle/>
+          <a:p>
+            <a:pPr eaLnBrk="1" hangingPunct="1"/>
+            <a:r>
+              <a:rPr lang="en-US" altLang="en-US" dirty="0">
+                <a:ea typeface="ＭＳ Ｐゴシック" panose="020B0600070205080204" pitchFamily="34" charset="-128"/>
+              </a:rPr>
+              <a:t>UTF-16 and UTF-8</a:t>
+            </a:r>
+          </a:p>
+        </p:txBody>
+      </p:sp>
+      <p:sp>
+        <p:nvSpPr>
+          <p:cNvPr id="3" name="Content Placeholder 2">
+            <a:extLst>
+              <a:ext uri="{FF2B5EF4-FFF2-40B4-BE49-F238E27FC236}">
+                <a16:creationId xmlns:a16="http://schemas.microsoft.com/office/drawing/2014/main" id="{EDD173A5-7515-4344-96F1-DFBABC544ED0}"/>
+              </a:ext>
+            </a:extLst>
+          </p:cNvPr>
+          <p:cNvSpPr>
+            <a:spLocks noGrp="1" noChangeArrowheads="1"/>
+          </p:cNvSpPr>
+          <p:nvPr>
+            <p:ph idx="1"/>
+          </p:nvPr>
+        </p:nvSpPr>
+        <p:spPr>
+          <a:xfrm>
+            <a:off x="266925" y="883578"/>
+            <a:ext cx="8733237" cy="4633644"/>
+          </a:xfrm>
+        </p:spPr>
+        <p:txBody>
+          <a:bodyPr/>
+          <a:lstStyle/>
+          <a:p>
+            <a:pPr marL="0" indent="0">
+              <a:buNone/>
+            </a:pPr>
+            <a:r>
+              <a:rPr lang="en-US" altLang="en-US" sz="1667" b="1" dirty="0">
+                <a:ea typeface="ＭＳ Ｐゴシック" panose="020B0600070205080204" pitchFamily="34" charset="-128"/>
+              </a:rPr>
+              <a:t>UTF-16 </a:t>
+            </a:r>
+            <a:r>
+              <a:rPr lang="en-US" altLang="en-US" sz="1667" dirty="0">
+                <a:ea typeface="ＭＳ Ｐゴシック" panose="020B0600070205080204" pitchFamily="34" charset="-128"/>
+              </a:rPr>
+              <a:t>and </a:t>
+            </a:r>
+            <a:r>
+              <a:rPr lang="en-US" altLang="en-US" sz="1667" b="1" dirty="0">
+                <a:ea typeface="ＭＳ Ｐゴシック" panose="020B0600070205080204" pitchFamily="34" charset="-128"/>
+              </a:rPr>
+              <a:t>UTF-8 </a:t>
+            </a:r>
+            <a:r>
+              <a:rPr lang="en-US" altLang="en-US" sz="1667" dirty="0">
+                <a:ea typeface="ＭＳ Ｐゴシック" panose="020B0600070205080204" pitchFamily="34" charset="-128"/>
+              </a:rPr>
+              <a:t>are </a:t>
+            </a:r>
+            <a:r>
+              <a:rPr lang="en-US" altLang="en-US" sz="1667" i="1" dirty="0">
+                <a:ea typeface="ＭＳ Ｐゴシック" panose="020B0600070205080204" pitchFamily="34" charset="-128"/>
+              </a:rPr>
+              <a:t>variable-length encodings</a:t>
+            </a:r>
+            <a:r>
+              <a:rPr lang="en-US" altLang="en-US" sz="1667" dirty="0">
+                <a:ea typeface="ＭＳ Ｐゴシック" panose="020B0600070205080204" pitchFamily="34" charset="-128"/>
+              </a:rPr>
+              <a:t>. If a character can be represented using a single byte (because its code point is a very small number), UTF-8 will encode it with a single byte. If it requires two bytes, it will use two bytes and so on. UTF-16 is in the middle, using at least two bytes, growing to up to four bytes as necessary.</a:t>
+            </a:r>
+          </a:p>
+          <a:p>
+            <a:pPr marL="0" indent="0">
+              <a:buNone/>
+            </a:pPr>
+            <a:endParaRPr lang="en-US" altLang="en-US" sz="1667" dirty="0">
+              <a:ea typeface="ＭＳ Ｐゴシック" panose="020B0600070205080204" pitchFamily="34" charset="-128"/>
+            </a:endParaRPr>
+          </a:p>
+          <a:p>
+            <a:pPr marL="0" indent="0">
+              <a:buNone/>
+            </a:pPr>
+            <a:endParaRPr lang="en-US" altLang="en-US" sz="1667" dirty="0">
+              <a:ea typeface="ＭＳ Ｐゴシック" panose="020B0600070205080204" pitchFamily="34" charset="-128"/>
+            </a:endParaRPr>
+          </a:p>
+          <a:p>
+            <a:pPr marL="0" indent="0">
+              <a:buNone/>
+            </a:pPr>
+            <a:endParaRPr lang="en-US" altLang="en-US" sz="1667" dirty="0">
+              <a:ea typeface="ＭＳ Ｐゴシック" panose="020B0600070205080204" pitchFamily="34" charset="-128"/>
+            </a:endParaRPr>
+          </a:p>
+          <a:p>
+            <a:pPr marL="0" indent="0">
+              <a:buNone/>
+            </a:pPr>
+            <a:endParaRPr lang="en-US" altLang="en-US" sz="1667" dirty="0">
+              <a:ea typeface="ＭＳ Ｐゴシック" panose="020B0600070205080204" pitchFamily="34" charset="-128"/>
+            </a:endParaRPr>
+          </a:p>
+          <a:p>
+            <a:pPr marL="0" indent="0">
+              <a:buNone/>
+            </a:pPr>
+            <a:endParaRPr lang="en-US" altLang="en-US" sz="1667" dirty="0">
+              <a:ea typeface="ＭＳ Ｐゴシック" panose="020B0600070205080204" pitchFamily="34" charset="-128"/>
+            </a:endParaRPr>
+          </a:p>
+          <a:p>
+            <a:pPr marL="0" indent="0">
+              <a:buNone/>
+            </a:pPr>
+            <a:endParaRPr lang="en-US" altLang="en-US" sz="1667" dirty="0">
+              <a:ea typeface="ＭＳ Ｐゴシック" panose="020B0600070205080204" pitchFamily="34" charset="-128"/>
+            </a:endParaRPr>
+          </a:p>
+          <a:p>
+            <a:pPr marL="0" indent="0">
+              <a:buNone/>
+            </a:pPr>
+            <a:endParaRPr lang="en-US" altLang="en-US" sz="1667" dirty="0">
+              <a:ea typeface="ＭＳ Ｐゴシック" panose="020B0600070205080204" pitchFamily="34" charset="-128"/>
+            </a:endParaRPr>
+          </a:p>
+          <a:p>
+            <a:pPr marL="0" indent="0">
+              <a:buNone/>
+            </a:pPr>
+            <a:endParaRPr lang="en-US" altLang="en-US" sz="1667" dirty="0">
+              <a:ea typeface="ＭＳ Ｐゴシック" panose="020B0600070205080204" pitchFamily="34" charset="-128"/>
+            </a:endParaRPr>
+          </a:p>
+          <a:p>
+            <a:pPr marL="0" indent="0">
+              <a:buNone/>
+            </a:pPr>
+            <a:endParaRPr lang="en-US" altLang="en-US" sz="1667" dirty="0">
+              <a:ea typeface="ＭＳ Ｐゴシック" panose="020B0600070205080204" pitchFamily="34" charset="-128"/>
+            </a:endParaRPr>
+          </a:p>
+          <a:p>
+            <a:pPr marL="0" indent="0">
+              <a:buNone/>
+            </a:pPr>
+            <a:r>
+              <a:rPr lang="en-US" altLang="en-US" sz="1667" b="1" dirty="0">
+                <a:ea typeface="ＭＳ Ｐゴシック" panose="020B0600070205080204" pitchFamily="34" charset="-128"/>
+              </a:rPr>
+              <a:t>Unicode is a large table mapping characters to numbers and the different UTF encodings specify how these numbers are encoded as bits.</a:t>
+            </a:r>
+          </a:p>
+          <a:p>
+            <a:pPr marL="0" indent="0">
+              <a:buNone/>
+            </a:pPr>
+            <a:endParaRPr lang="en-US" altLang="en-US" sz="1667" dirty="0">
+              <a:ea typeface="ＭＳ Ｐゴシック" panose="020B0600070205080204" pitchFamily="34" charset="-128"/>
+            </a:endParaRPr>
+          </a:p>
+          <a:p>
+            <a:pPr marL="0" indent="0">
+              <a:buNone/>
+            </a:pPr>
+            <a:endParaRPr lang="en-US" altLang="en-US" sz="1667" dirty="0">
+              <a:ea typeface="ＭＳ Ｐゴシック" panose="020B0600070205080204" pitchFamily="34" charset="-128"/>
+            </a:endParaRPr>
+          </a:p>
+        </p:txBody>
+      </p:sp>
+      <p:sp>
+        <p:nvSpPr>
+          <p:cNvPr id="48131" name="TextBox 3">
+            <a:extLst>
+              <a:ext uri="{FF2B5EF4-FFF2-40B4-BE49-F238E27FC236}">
+                <a16:creationId xmlns:a16="http://schemas.microsoft.com/office/drawing/2014/main" id="{DDB8E675-AFDF-E34D-9CF4-E13C67A198ED}"/>
+              </a:ext>
+            </a:extLst>
+          </p:cNvPr>
+          <p:cNvSpPr txBox="1">
+            <a:spLocks noChangeArrowheads="1"/>
+          </p:cNvSpPr>
+          <p:nvPr/>
+        </p:nvSpPr>
+        <p:spPr bwMode="auto">
+          <a:xfrm>
+            <a:off x="3892021" y="67470"/>
+            <a:ext cx="184731" cy="323165"/>
+          </a:xfrm>
+          <a:prstGeom prst="rect">
+            <a:avLst/>
+          </a:prstGeom>
+          <a:noFill/>
+          <a:ln>
+            <a:noFill/>
+          </a:ln>
+          <a:extLst>
+            <a:ext uri="{909E8E84-426E-40DD-AFC4-6F175D3DCCD1}">
+              <a14:hiddenFill xmlns:a14="http://schemas.microsoft.com/office/drawing/2010/main">
+                <a:solidFill>
+                  <a:srgbClr val="FFFFFF"/>
+                </a:solidFill>
+              </a14:hiddenFill>
+            </a:ext>
+            <a:ext uri="{91240B29-F687-4F45-9708-019B960494DF}">
+              <a14:hiddenLine xmlns:a14="http://schemas.microsoft.com/office/drawing/2010/main" w="9525">
+                <a:solidFill>
+                  <a:srgbClr val="000000"/>
+                </a:solidFill>
+                <a:miter lim="800000"/>
+                <a:headEnd/>
+                <a:tailEnd/>
+              </a14:hiddenLine>
+            </a:ext>
+          </a:extLst>
+        </p:spPr>
+        <p:txBody>
+          <a:bodyPr wrap="none">
+            <a:spAutoFit/>
+          </a:bodyPr>
+          <a:lstStyle>
+            <a:lvl1pPr>
+              <a:spcBef>
+                <a:spcPct val="20000"/>
+              </a:spcBef>
+              <a:buChar char="•"/>
+              <a:defRPr sz="3200">
+                <a:solidFill>
+                  <a:schemeClr val="tx1"/>
+                </a:solidFill>
+                <a:latin typeface="Arial" panose="020B0604020202020204" pitchFamily="34" charset="0"/>
+                <a:ea typeface="ＭＳ Ｐゴシック" panose="020B0600070205080204" pitchFamily="34" charset="-128"/>
+                <a:cs typeface="Arial" panose="020B0604020202020204" pitchFamily="34" charset="0"/>
+              </a:defRPr>
+            </a:lvl1pPr>
+            <a:lvl2pPr marL="742950" indent="-285750">
+              <a:spcBef>
+                <a:spcPct val="20000"/>
+              </a:spcBef>
+              <a:buChar char="–"/>
+              <a:defRPr sz="2800">
+                <a:solidFill>
+                  <a:schemeClr val="tx1"/>
+                </a:solidFill>
+                <a:latin typeface="Arial" panose="020B0604020202020204" pitchFamily="34" charset="0"/>
+                <a:ea typeface="Arial" panose="020B0604020202020204" pitchFamily="34" charset="0"/>
+                <a:cs typeface="Arial" panose="020B0604020202020204" pitchFamily="34" charset="0"/>
+              </a:defRPr>
+            </a:lvl2pPr>
+            <a:lvl3pPr marL="1143000" indent="-228600">
+              <a:spcBef>
+                <a:spcPct val="20000"/>
+              </a:spcBef>
+              <a:buChar char="•"/>
+              <a:defRPr sz="2400">
+                <a:solidFill>
+                  <a:schemeClr val="tx1"/>
+                </a:solidFill>
+                <a:latin typeface="Arial" panose="020B0604020202020204" pitchFamily="34" charset="0"/>
+                <a:ea typeface="Arial" panose="020B0604020202020204" pitchFamily="34" charset="0"/>
+                <a:cs typeface="Arial" panose="020B0604020202020204" pitchFamily="34" charset="0"/>
+              </a:defRPr>
+            </a:lvl3pPr>
+            <a:lvl4pPr marL="1600200" indent="-228600">
+              <a:spcBef>
+                <a:spcPct val="20000"/>
+              </a:spcBef>
+              <a:buChar char="–"/>
+              <a:defRPr sz="2000">
+                <a:solidFill>
+                  <a:schemeClr val="tx1"/>
+                </a:solidFill>
+                <a:latin typeface="Arial" panose="020B0604020202020204" pitchFamily="34" charset="0"/>
+                <a:ea typeface="Arial" panose="020B0604020202020204" pitchFamily="34" charset="0"/>
+                <a:cs typeface="Arial" panose="020B0604020202020204" pitchFamily="34" charset="0"/>
+              </a:defRPr>
+            </a:lvl4pPr>
+            <a:lvl5pPr marL="2057400" indent="-228600">
+              <a:spcBef>
+                <a:spcPct val="20000"/>
+              </a:spcBef>
+              <a:buChar char="»"/>
+              <a:defRPr sz="2000">
+                <a:solidFill>
+                  <a:schemeClr val="tx1"/>
+                </a:solidFill>
+                <a:latin typeface="Arial" panose="020B0604020202020204" pitchFamily="34" charset="0"/>
+                <a:ea typeface="Arial" panose="020B0604020202020204" pitchFamily="34" charset="0"/>
+                <a:cs typeface="Arial" panose="020B0604020202020204" pitchFamily="34" charset="0"/>
+              </a:defRPr>
+            </a:lvl5pPr>
+            <a:lvl6pPr marL="2514600" indent="-228600" eaLnBrk="0" fontAlgn="base" hangingPunct="0">
+              <a:spcBef>
+                <a:spcPct val="20000"/>
+              </a:spcBef>
+              <a:spcAft>
+                <a:spcPct val="0"/>
+              </a:spcAft>
+              <a:buChar char="»"/>
+              <a:defRPr sz="2000">
+                <a:solidFill>
+                  <a:schemeClr val="tx1"/>
+                </a:solidFill>
+                <a:latin typeface="Arial" panose="020B0604020202020204" pitchFamily="34" charset="0"/>
+                <a:ea typeface="Arial" panose="020B0604020202020204" pitchFamily="34" charset="0"/>
+                <a:cs typeface="Arial" panose="020B0604020202020204" pitchFamily="34" charset="0"/>
+              </a:defRPr>
+            </a:lvl6pPr>
+            <a:lvl7pPr marL="2971800" indent="-228600" eaLnBrk="0" fontAlgn="base" hangingPunct="0">
+              <a:spcBef>
+                <a:spcPct val="20000"/>
+              </a:spcBef>
+              <a:spcAft>
+                <a:spcPct val="0"/>
+              </a:spcAft>
+              <a:buChar char="»"/>
+              <a:defRPr sz="2000">
+                <a:solidFill>
+                  <a:schemeClr val="tx1"/>
+                </a:solidFill>
+                <a:latin typeface="Arial" panose="020B0604020202020204" pitchFamily="34" charset="0"/>
+                <a:ea typeface="Arial" panose="020B0604020202020204" pitchFamily="34" charset="0"/>
+                <a:cs typeface="Arial" panose="020B0604020202020204" pitchFamily="34" charset="0"/>
+              </a:defRPr>
+            </a:lvl7pPr>
+            <a:lvl8pPr marL="3429000" indent="-228600" eaLnBrk="0" fontAlgn="base" hangingPunct="0">
+              <a:spcBef>
+                <a:spcPct val="20000"/>
+              </a:spcBef>
+              <a:spcAft>
+                <a:spcPct val="0"/>
+              </a:spcAft>
+              <a:buChar char="»"/>
+              <a:defRPr sz="2000">
+                <a:solidFill>
+                  <a:schemeClr val="tx1"/>
+                </a:solidFill>
+                <a:latin typeface="Arial" panose="020B0604020202020204" pitchFamily="34" charset="0"/>
+                <a:ea typeface="Arial" panose="020B0604020202020204" pitchFamily="34" charset="0"/>
+                <a:cs typeface="Arial" panose="020B0604020202020204" pitchFamily="34" charset="0"/>
+              </a:defRPr>
+            </a:lvl8pPr>
+            <a:lvl9pPr marL="3886200" indent="-228600" eaLnBrk="0" fontAlgn="base" hangingPunct="0">
+              <a:spcBef>
+                <a:spcPct val="20000"/>
+              </a:spcBef>
+              <a:spcAft>
+                <a:spcPct val="0"/>
+              </a:spcAft>
+              <a:buChar char="»"/>
+              <a:defRPr sz="2000">
+                <a:solidFill>
+                  <a:schemeClr val="tx1"/>
+                </a:solidFill>
+                <a:latin typeface="Arial" panose="020B0604020202020204" pitchFamily="34" charset="0"/>
+                <a:ea typeface="Arial" panose="020B0604020202020204" pitchFamily="34" charset="0"/>
+                <a:cs typeface="Arial" panose="020B0604020202020204" pitchFamily="34" charset="0"/>
+              </a:defRPr>
+            </a:lvl9pPr>
+          </a:lstStyle>
+          <a:p>
+            <a:pPr>
+              <a:spcBef>
+                <a:spcPct val="0"/>
+              </a:spcBef>
+              <a:buFontTx/>
+              <a:buNone/>
+            </a:pPr>
+            <a:endParaRPr lang="en-US" altLang="en-US" sz="1500"/>
+          </a:p>
+        </p:txBody>
+      </p:sp>
+      <p:pic>
+        <p:nvPicPr>
+          <p:cNvPr id="5" name="Picture 3">
+            <a:extLst>
+              <a:ext uri="{FF2B5EF4-FFF2-40B4-BE49-F238E27FC236}">
+                <a16:creationId xmlns:a16="http://schemas.microsoft.com/office/drawing/2014/main" id="{CA642D09-6AF6-464A-A462-CA3AD0CFF973}"/>
+              </a:ext>
+            </a:extLst>
+          </p:cNvPr>
+          <p:cNvPicPr>
+            <a:picLocks noChangeAspect="1"/>
+          </p:cNvPicPr>
+          <p:nvPr/>
+        </p:nvPicPr>
+        <p:blipFill>
+          <a:blip r:embed="rId2">
+            <a:extLst>
+              <a:ext uri="{28A0092B-C50C-407E-A947-70E740481C1C}">
+                <a14:useLocalDpi xmlns:a14="http://schemas.microsoft.com/office/drawing/2010/main" val="0"/>
+              </a:ext>
+            </a:extLst>
+          </a:blip>
+          <a:srcRect/>
+          <a:stretch>
+            <a:fillRect/>
+          </a:stretch>
+        </p:blipFill>
+        <p:spPr bwMode="auto">
+          <a:xfrm>
+            <a:off x="1659302" y="2004080"/>
+            <a:ext cx="6703218" cy="2700073"/>
+          </a:xfrm>
+          <a:prstGeom prst="rect">
+            <a:avLst/>
+          </a:prstGeom>
+          <a:noFill/>
+          <a:ln>
+            <a:noFill/>
+          </a:ln>
+          <a:extLst>
+            <a:ext uri="{909E8E84-426E-40DD-AFC4-6F175D3DCCD1}">
+              <a14:hiddenFill xmlns:a14="http://schemas.microsoft.com/office/drawing/2010/main">
+                <a:solidFill>
+                  <a:srgbClr val="FFFFFF"/>
+                </a:solidFill>
+              </a14:hiddenFill>
+            </a:ext>
+            <a:ext uri="{91240B29-F687-4F45-9708-019B960494DF}">
+              <a14:hiddenLine xmlns:a14="http://schemas.microsoft.com/office/drawing/2010/main" w="9525">
+                <a:solidFill>
+                  <a:srgbClr val="000000"/>
+                </a:solidFill>
+                <a:miter lim="800000"/>
+                <a:headEnd/>
+                <a:tailEnd/>
+              </a14:hiddenLine>
+            </a:ext>
+          </a:extLst>
+        </p:spPr>
+      </p:pic>
+      <p:sp>
+        <p:nvSpPr>
+          <p:cNvPr id="2" name="Slide Number Placeholder 1">
+            <a:extLst>
+              <a:ext uri="{FF2B5EF4-FFF2-40B4-BE49-F238E27FC236}">
+                <a16:creationId xmlns:a16="http://schemas.microsoft.com/office/drawing/2014/main" id="{161C1759-1CD1-C726-B41B-4CEB12A16F73}"/>
+              </a:ext>
+            </a:extLst>
+          </p:cNvPr>
+          <p:cNvSpPr>
+            <a:spLocks noGrp="1"/>
+          </p:cNvSpPr>
+          <p:nvPr>
+            <p:ph type="sldNum" sz="quarter" idx="12"/>
+          </p:nvPr>
+        </p:nvSpPr>
+        <p:spPr/>
+        <p:txBody>
+          <a:bodyPr/>
+          <a:lstStyle/>
+          <a:p>
+            <a:fld id="{D57F1E4F-1CFF-5643-939E-02111984F565}" type="slidenum">
+              <a:rPr lang="en-US" smtClean="0"/>
+              <a:t>30</a:t>
+            </a:fld>
+            <a:endParaRPr lang="en-US" dirty="0"/>
+          </a:p>
+        </p:txBody>
+      </p:sp>
+    </p:spTree>
+    <p:extLst>
+      <p:ext uri="{BB962C8B-B14F-4D97-AF65-F5344CB8AC3E}">
+        <p14:creationId xmlns:p14="http://schemas.microsoft.com/office/powerpoint/2010/main" val="461704868"/>
+      </p:ext>
+    </p:extLst>
+  </p:cSld>
+  <p:clrMapOvr>
+    <a:masterClrMapping/>
+  </p:clrMapOvr>
+  <p:timing>
+    <p:tnLst>
+      <p:par>
+        <p:cTn id="1" dur="indefinite" restart="never" nodeType="tmRoot">
+          <p:childTnLst>
+            <p:seq concurrent="1" nextAc="seek">
+              <p:cTn id="2" dur="indefinite" nodeType="mainSeq">
+                <p:childTnLst>
+                  <p:par>
+                    <p:cTn id="3" fill="hold" nodeType="clickPar">
+                      <p:stCondLst>
+                        <p:cond delay="indefinite"/>
+                      </p:stCondLst>
+                      <p:childTnLst>
+                        <p:par>
+                          <p:cTn id="4" fill="hold" nodeType="withGroup">
+                            <p:stCondLst>
+                              <p:cond delay="0"/>
+                            </p:stCondLst>
+                            <p:childTnLst>
+                              <p:par>
+                                <p:cTn id="5" presetID="1" presetClass="entr" presetSubtype="0" fill="hold" nodeType="clickEffect">
+                                  <p:stCondLst>
+                                    <p:cond delay="0"/>
+                                  </p:stCondLst>
+                                  <p:childTnLst>
+                                    <p:set>
+                                      <p:cBhvr>
+                                        <p:cTn id="6" dur="1" fill="hold">
+                                          <p:stCondLst>
+                                            <p:cond delay="0"/>
+                                          </p:stCondLst>
+                                        </p:cTn>
+                                        <p:tgtEl>
+                                          <p:spTgt spid="3">
+                                            <p:txEl>
+                                              <p:pRg st="0" end="0"/>
+                                            </p:txEl>
+                                          </p:spTgt>
+                                        </p:tgtEl>
+                                        <p:attrNameLst>
+                                          <p:attrName>style.visibility</p:attrName>
+                                        </p:attrNameLst>
+                                      </p:cBhvr>
+                                      <p:to>
+                                        <p:strVal val="visible"/>
+                                      </p:to>
+                                    </p:set>
+                                  </p:childTnLst>
+                                </p:cTn>
+                              </p:par>
+                            </p:childTnLst>
+                          </p:cTn>
+                        </p:par>
+                      </p:childTnLst>
+                    </p:cTn>
+                  </p:par>
+                  <p:par>
+                    <p:cTn id="7" fill="hold">
+                      <p:stCondLst>
+                        <p:cond delay="indefinite"/>
+                      </p:stCondLst>
+                      <p:childTnLst>
+                        <p:par>
+                          <p:cTn id="8" fill="hold">
+                            <p:stCondLst>
+                              <p:cond delay="0"/>
+                            </p:stCondLst>
+                            <p:childTnLst>
+                              <p:par>
+                                <p:cTn id="9" presetID="1" presetClass="entr" presetSubtype="0" fill="hold" nodeType="clickEffect">
+                                  <p:stCondLst>
+                                    <p:cond delay="0"/>
+                                  </p:stCondLst>
+                                  <p:childTnLst>
+                                    <p:set>
+                                      <p:cBhvr>
+                                        <p:cTn id="10" dur="1" fill="hold">
+                                          <p:stCondLst>
+                                            <p:cond delay="0"/>
+                                          </p:stCondLst>
+                                        </p:cTn>
+                                        <p:tgtEl>
+                                          <p:spTgt spid="3">
+                                            <p:txEl>
+                                              <p:pRg st="10" end="10"/>
+                                            </p:txEl>
+                                          </p:spTgt>
+                                        </p:tgtEl>
+                                        <p:attrNameLst>
+                                          <p:attrName>style.visibility</p:attrName>
+                                        </p:attrNameLst>
+                                      </p:cBhvr>
+                                      <p:to>
+                                        <p:strVal val="visible"/>
+                                      </p:to>
+                                    </p:set>
+                                  </p:childTnLst>
+                                </p:cTn>
+                              </p:par>
+                            </p:childTnLst>
+                          </p:cTn>
+                        </p:par>
+                      </p:childTnLst>
+                    </p:cTn>
+                  </p:par>
+                </p:childTnLst>
+              </p:cTn>
+              <p:prevCondLst>
+                <p:cond evt="onPrev" delay="0">
+                  <p:tgtEl>
+                    <p:sldTgt/>
+                  </p:tgtEl>
+                </p:cond>
+              </p:prevCondLst>
+              <p:nextCondLst>
+                <p:cond evt="onNext" delay="0">
+                  <p:tgtEl>
+                    <p:sldTgt/>
+                  </p:tgtEl>
+                </p:cond>
+              </p:nextCondLst>
+            </p:seq>
+          </p:childTnLst>
+        </p:cTn>
+      </p:par>
+    </p:tnLst>
+  </p:timing>
+</p:sld>
+</file>
+
+<file path=ppt/slides/slide31.xml><?xml version="1.0" encoding="utf-8"?>
+<p:sld xmlns:a="http://schemas.openxmlformats.org/drawingml/2006/main" xmlns:r="http://schemas.openxmlformats.org/officeDocument/2006/relationships" xmlns:p="http://schemas.openxmlformats.org/presentationml/2006/main">
+  <p:cSld>
+    <p:spTree>
+      <p:nvGrpSpPr>
+        <p:cNvPr id="1" name=""/>
+        <p:cNvGrpSpPr/>
+        <p:nvPr/>
+      </p:nvGrpSpPr>
+      <p:grpSpPr>
+        <a:xfrm>
+          <a:off x="0" y="0"/>
+          <a:ext cx="0" cy="0"/>
+          <a:chOff x="0" y="0"/>
+          <a:chExt cx="0" cy="0"/>
+        </a:xfrm>
+      </p:grpSpPr>
+      <p:sp>
+        <p:nvSpPr>
           <p:cNvPr id="37889" name="Title 1">
             <a:extLst>
               <a:ext uri="{FF2B5EF4-FFF2-40B4-BE49-F238E27FC236}">
@@ -17683,7 +17846,7 @@
           <a:p>
             <a:fld id="{D57F1E4F-1CFF-5643-939E-02111984F565}" type="slidenum">
               <a:rPr lang="en-US" smtClean="0"/>
-              <a:t>30</a:t>
+              <a:t>31</a:t>
             </a:fld>
             <a:endParaRPr lang="en-US" dirty="0"/>
           </a:p>
@@ -18034,7 +18197,7 @@
 </p:sld>
 </file>
 
-<file path=ppt/slides/slide31.xml><?xml version="1.0" encoding="utf-8"?>
+<file path=ppt/slides/slide32.xml><?xml version="1.0" encoding="utf-8"?>
 <p:sld xmlns:a="http://schemas.openxmlformats.org/drawingml/2006/main" xmlns:r="http://schemas.openxmlformats.org/officeDocument/2006/relationships" xmlns:p="http://schemas.openxmlformats.org/presentationml/2006/main">
   <p:cSld>
     <p:spTree>
@@ -18855,7 +19018,7 @@
           <a:p>
             <a:fld id="{D57F1E4F-1CFF-5643-939E-02111984F565}" type="slidenum">
               <a:rPr lang="en-US" smtClean="0"/>
-              <a:t>31</a:t>
+              <a:t>32</a:t>
             </a:fld>
             <a:endParaRPr lang="en-US" dirty="0"/>
           </a:p>
@@ -19259,7 +19422,7 @@
 </p:sld>
 </file>
 
-<file path=ppt/slides/slide32.xml><?xml version="1.0" encoding="utf-8"?>
+<file path=ppt/slides/slide33.xml><?xml version="1.0" encoding="utf-8"?>
 <p:sld xmlns:a="http://schemas.openxmlformats.org/drawingml/2006/main" xmlns:r="http://schemas.openxmlformats.org/officeDocument/2006/relationships" xmlns:p="http://schemas.openxmlformats.org/presentationml/2006/main">
   <p:cSld>
     <p:spTree>
@@ -19458,7 +19621,7 @@
           <a:p>
             <a:fld id="{D57F1E4F-1CFF-5643-939E-02111984F565}" type="slidenum">
               <a:rPr lang="en-US" smtClean="0"/>
-              <a:t>32</a:t>
+              <a:t>33</a:t>
             </a:fld>
             <a:endParaRPr lang="en-US" dirty="0"/>
           </a:p>
@@ -19655,7 +19818,7 @@
 </p:sld>
 </file>
 
-<file path=ppt/slides/slide33.xml><?xml version="1.0" encoding="utf-8"?>
+<file path=ppt/slides/slide34.xml><?xml version="1.0" encoding="utf-8"?>
 <p:sld xmlns:a="http://schemas.openxmlformats.org/drawingml/2006/main" xmlns:r="http://schemas.openxmlformats.org/officeDocument/2006/relationships" xmlns:p="http://schemas.openxmlformats.org/presentationml/2006/main">
   <p:cSld>
     <p:spTree>
@@ -20033,7 +20196,7 @@
           <a:p>
             <a:fld id="{D57F1E4F-1CFF-5643-939E-02111984F565}" type="slidenum">
               <a:rPr lang="en-US" smtClean="0"/>
-              <a:t>33</a:t>
+              <a:t>34</a:t>
             </a:fld>
             <a:endParaRPr lang="en-US" dirty="0"/>
           </a:p>
